--- a/deliverables/VIDEO_5_Why_Nobody_Can_Tell_What_Youre_Actually_Good_At_FINAL/Recording_Support_Deck.pptx
+++ b/deliverables/VIDEO_5_Why_Nobody_Can_Tell_What_Youre_Actually_Good_At_FINAL/Recording_Support_Deck.pptx
@@ -511,30 +511,36 @@
           <a:lstStyle/>
           <a:p>
             <a:r>
-              <a:t>V5_MG01_Respected_But_Hard_To_Place.png  (MG01)</a:t>
+              <a:t>V5_MG01_Two_Versions_Of_The_Same_Career.png  (MG01)</a:t>
             </a:r>
           </a:p>
           <a:p/>
           <a:p>
             <a:r>
-              <a:t>On screen: RESPECTED. BUT HARD TO PLACE.</a:t>
+              <a:t>Status: REBUILD</a:t>
             </a:r>
           </a:p>
           <a:p/>
           <a:p>
             <a:r>
-              <a:t>Script: "People can respect your experience and still have no idea what to do with you."</a:t>
+              <a:t>On screen: THE RESUME VERSION: where I have been / THE CLAIM: what I get brought in to do</a:t>
             </a:r>
           </a:p>
           <a:p/>
           <a:p>
             <a:r>
-              <a:t>Purpose: The tension of the video, on screen in the first thirty seconds.</a:t>
-            </a:r>
-          </a:p>
-          <a:p>
-            <a:r>
-              <a:t>Hold: 7 to 8 seconds</a:t>
+              <a:t>Script: One describes where I have been.</a:t>
+            </a:r>
+          </a:p>
+          <a:p/>
+          <a:p>
+            <a:r>
+              <a:t>Purpose: The demonstration the video now opens on. The viewer hears both versions and sees the difference named.</a:t>
+            </a:r>
+          </a:p>
+          <a:p>
+            <a:r>
+              <a:t>Hold: 10 to 12 seconds, across both spoken versions.</a:t>
             </a:r>
           </a:p>
         </p:txBody>
@@ -610,19 +616,25 @@
           <a:p/>
           <a:p>
             <a:r>
+              <a:t>Status: REUSE</a:t>
+            </a:r>
+          </a:p>
+          <a:p/>
+          <a:p>
+            <a:r>
               <a:t>On screen: WATCH NEXT: HOW TO CHANGE JOBS WITHOUT STARTING YOUR CAREER OVER</a:t>
             </a:r>
           </a:p>
           <a:p/>
           <a:p>
             <a:r>
-              <a:t>Script: "Watch How to Change Jobs Without Starting Your Career Over next."</a:t>
+              <a:t>Script: Watch “How to Change Jobs Without Starting Your Career Over” next.</a:t>
             </a:r>
           </a:p>
           <a:p/>
           <a:p>
             <a:r>
-              <a:t>Purpose: Final visual. Routes to Video 1, not back to Video 4. Right of frame kept clear for the clickable end-screen element.</a:t>
+              <a:t>Purpose: Final visual. Routes to Video 1. Right of frame kept clear for the clickable end-screen element.</a:t>
             </a:r>
           </a:p>
           <a:p>
@@ -697,30 +709,36 @@
           <a:lstStyle/>
           <a:p>
             <a:r>
-              <a:t>V5_MG02_Sorting_Mechanism.png  (MG02)</a:t>
+              <a:t>V5_MG02_The_One_Line_Test.png  (MG02)</a:t>
             </a:r>
           </a:p>
           <a:p/>
           <a:p>
             <a:r>
-              <a:t>On screen: MULTIPLE POSSIBLE CATEGORIES  to  NEAREST CATEGORY  to  A SMALLER BOX THAN YOUR ACTUAL CAPABILITY</a:t>
+              <a:t>Status: REORDER</a:t>
             </a:r>
           </a:p>
           <a:p/>
           <a:p>
             <a:r>
-              <a:t>Script: "They grab the closest category they can see, and they put you there. And that category is often smaller than what you can actually do."</a:t>
+              <a:t>On screen: CLAIM / SPINE / RECEIPTS</a:t>
             </a:r>
           </a:p>
           <a:p/>
           <a:p>
             <a:r>
-              <a:t>Purpose: Shows the mechanism as three steps so the viewer stops reading it as unfairness and starts reading it as information they control.</a:t>
-            </a:r>
-          </a:p>
-          <a:p>
-            <a:r>
-              <a:t>Hold: 9 to 10 seconds</a:t>
+              <a:t>Script: Claim. Spine. Receipts.</a:t>
+            </a:r>
+          </a:p>
+          <a:p/>
+          <a:p>
+            <a:r>
+              <a:t>Purpose: The hero framework. Returns briefly at each of the three section changes.</a:t>
+            </a:r>
+          </a:p>
+          <a:p>
+            <a:r>
+              <a:t>Hold: 9 to 11 seconds first time, 3 seconds on each return.</a:t>
             </a:r>
           </a:p>
         </p:txBody>
@@ -790,30 +808,36 @@
           <a:lstStyle/>
           <a:p>
             <a:r>
-              <a:t>V5_MG03_The_One_Line_Test.png  (MG03)</a:t>
+              <a:t>V5_MG03_Sharper_Versus_Defensible.png  (MG03)</a:t>
             </a:r>
           </a:p>
           <a:p/>
           <a:p>
             <a:r>
-              <a:t>On screen: CLAIM / SPINE / RECEIPTS</a:t>
+              <a:t>Status: REORDER</a:t>
             </a:r>
           </a:p>
           <a:p/>
           <a:p>
             <a:r>
-              <a:t>Script: "That is where the One-Line Test comes in. Claim. Spine. Receipts."</a:t>
+              <a:t>On screen: SHARPER CLAIM vs DEFENSIBLE CLAIM</a:t>
             </a:r>
           </a:p>
           <a:p/>
           <a:p>
             <a:r>
-              <a:t>Purpose: The hero framework. Returns briefly at each of the three section changes.</a:t>
-            </a:r>
-          </a:p>
-          <a:p>
-            <a:r>
-              <a:t>Hold: 9 to 11 seconds first time, 3 seconds on each return.</a:t>
+              <a:t>Script: So the sharper sentence was not the more defensible sentence.</a:t>
+            </a:r>
+          </a:p>
+          <a:p/>
+          <a:p>
+            <a:r>
+              <a:t>Purpose: The judgment call at the heart of the Claim section, shown as a trade rather than a mistake.</a:t>
+            </a:r>
+          </a:p>
+          <a:p>
+            <a:r>
+              <a:t>Hold: 9 to 10 seconds</a:t>
             </a:r>
           </a:p>
         </p:txBody>
@@ -883,25 +907,31 @@
           <a:lstStyle/>
           <a:p>
             <a:r>
-              <a:t>V5_MG04_Sharper_Versus_Defensible.png  (MG04)</a:t>
+              <a:t>V5_MG04_Sorting_Mechanism.png  (MG04)</a:t>
             </a:r>
           </a:p>
           <a:p/>
           <a:p>
             <a:r>
-              <a:t>On screen: SHARPER CLAIM vs DEFENSIBLE CLAIM</a:t>
+              <a:t>Status: REORDER</a:t>
             </a:r>
           </a:p>
           <a:p/>
           <a:p>
             <a:r>
-              <a:t>Script: "So the sharper sentence was not the more defensible sentence... Choose the one you can defend."</a:t>
+              <a:t>On screen: MULTIPLE POSSIBLE CATEGORIES  to  NEAREST CATEGORY  to  A SMALLER BOX THAN YOUR ACTUAL CAPABILITY</a:t>
             </a:r>
           </a:p>
           <a:p/>
           <a:p>
             <a:r>
-              <a:t>Purpose: The judgment call at the heart of the Claim section, shown as a trade rather than a mistake.</a:t>
+              <a:t>Script: If your career gives them five categories, they normally do not keep all five.</a:t>
+            </a:r>
+          </a:p>
+          <a:p/>
+          <a:p>
+            <a:r>
+              <a:t>Purpose: Shows the mechanism as three steps, so the viewer reads it as information they control rather than as unfairness.</a:t>
             </a:r>
           </a:p>
           <a:p>
@@ -982,13 +1012,19 @@
           <a:p/>
           <a:p>
             <a:r>
+              <a:t>Status: REUSE</a:t>
+            </a:r>
+          </a:p>
+          <a:p/>
+          <a:p>
+            <a:r>
               <a:t>On screen: REMOVE THE NOUNS  /  LOOK AT THE VERBS</a:t>
             </a:r>
           </a:p>
           <a:p/>
           <a:p>
             <a:r>
-              <a:t>Script: "What broke it open was removing the nouns. Take out the industry. The system. The title. The employer. Look at the verbs."</a:t>
+              <a:t>Script: What broke it open was removing the nouns.</a:t>
             </a:r>
           </a:p>
           <a:p/>
@@ -1075,19 +1111,25 @@
           <a:p/>
           <a:p>
             <a:r>
+              <a:t>Status: REUSE</a:t>
+            </a:r>
+          </a:p>
+          <a:p/>
+          <a:p>
+            <a:r>
               <a:t>On screen: DIFFERENT CONTEXTS. SAME CLAIM.</a:t>
             </a:r>
           </a:p>
           <a:p/>
           <a:p>
             <a:r>
-              <a:t>Script: "Different organizations. Different years. Different outputs. Each Receipt stands on its own. And all three support the same Claim."</a:t>
+              <a:t>Script: Each Receipt stands on its own.</a:t>
             </a:r>
           </a:p>
           <a:p/>
           <a:p>
             <a:r>
-              <a:t>Purpose: States the rule that governs all three Receipts, rather than putting three bounded evidence claims on screen where the qualifiers would shrink to nothing on a phone.</a:t>
+              <a:t>Purpose: States the rule rather than putting three bounded evidence claims on screen.</a:t>
             </a:r>
           </a:p>
           <a:p>
@@ -1168,19 +1210,25 @@
           <a:p/>
           <a:p>
             <a:r>
+              <a:t>Status: COPY UPDATE</a:t>
+            </a:r>
+          </a:p>
+          <a:p/>
+          <a:p>
+            <a:r>
               <a:t>On screen: Does their next question ask about YOUR HISTORY or THE PROBLEM?</a:t>
             </a:r>
           </a:p>
           <a:p/>
           <a:p>
             <a:r>
-              <a:t>Script: "Listen to their next question."</a:t>
+              <a:t>Script: Listen to their next question.</a:t>
             </a:r>
           </a:p>
           <a:p/>
           <a:p>
             <a:r>
-              <a:t>Purpose: Gives the test and how to read the result in one frame.</a:t>
+              <a:t>Purpose: Gives the test and how to read the result in one frame, without turning a practical signal into a verdict.</a:t>
             </a:r>
           </a:p>
           <a:p>
@@ -1261,19 +1309,25 @@
           <a:p/>
           <a:p>
             <a:r>
+              <a:t>Status: REUSE</a:t>
+            </a:r>
+          </a:p>
+          <a:p/>
+          <a:p>
+            <a:r>
               <a:t>On screen: A SENTENCE CANNOT ERASE: market conditions, bias, credentials, domain gaps, real experience gaps</a:t>
             </a:r>
           </a:p>
           <a:p/>
           <a:p>
             <a:r>
-              <a:t>Script: "A better sentence cannot erase a weak market. It cannot erase bias or age discrimination."</a:t>
+              <a:t>Script: A better sentence cannot erase a weak market.</a:t>
             </a:r>
           </a:p>
           <a:p/>
           <a:p>
             <a:r>
-              <a:t>Purpose: Keeps the promise honest. Written as one line plus one sentence rather than a dense list, so it reads on a phone.</a:t>
+              <a:t>Purpose: Keeps the promise honest, as one line plus one sentence rather than a dense list.</a:t>
             </a:r>
           </a:p>
           <a:p>
@@ -1354,13 +1408,19 @@
           <a:p/>
           <a:p>
             <a:r>
+              <a:t>Status: REUSE</a:t>
+            </a:r>
+          </a:p>
+          <a:p/>
+          <a:p>
+            <a:r>
               <a:t>On screen: WRITE YOUR ONE-LINE CLAIM / Free 10-Minute Career Evidence Starter / temidayoafonja.com/career-evidence-starter</a:t>
             </a:r>
           </a:p>
           <a:p/>
           <a:p>
             <a:r>
-              <a:t>Script: "If yes, write the Claim in the comments... I put the free 10-Minute Career Evidence Starter in the pinned comment."</a:t>
+              <a:t>Script: If yes, write the Claim in the comments.</a:t>
             </a:r>
           </a:p>
           <a:p/>
@@ -4392,7 +4452,7 @@
             <a:avLst/>
           </a:prstGeom>
           <a:solidFill>
-            <a:srgbClr val="112345"/>
+            <a:srgbClr val="F5F1E8"/>
           </a:solidFill>
           <a:ln>
             <a:noFill/>
@@ -4429,7 +4489,92 @@
         </p:nvSpPr>
         <p:spPr>
           <a:xfrm>
-            <a:off x="1016000" y="2292540"/>
+            <a:off x="1016000" y="1066800"/>
+            <a:ext cx="10160000" cy="1524000"/>
+          </a:xfrm>
+          <a:prstGeom prst="rect">
+            <a:avLst/>
+          </a:prstGeom>
+          <a:noFill/>
+        </p:spPr>
+        <p:txBody>
+          <a:bodyPr wrap="square" lIns="0" rIns="0" tIns="0" bIns="0" anchor="t">
+            <a:spAutoFit/>
+          </a:bodyPr>
+          <a:lstStyle/>
+          <a:p>
+            <a:pPr algn="l">
+              <a:lnSpc>
+                <a:spcPct val="100000"/>
+              </a:lnSpc>
+            </a:pPr>
+            <a:r>
+              <a:rPr sz="1500" b="1" i="0" spc="250">
+                <a:solidFill>
+                  <a:srgbClr val="C9A84C"/>
+                </a:solidFill>
+                <a:latin typeface="Montserrat"/>
+                <a:ea typeface="Montserrat"/>
+                <a:cs typeface="Montserrat"/>
+              </a:rPr>
+              <a:t>TWO VERSIONS OF THE SAME CAREER</a:t>
+            </a:r>
+          </a:p>
+        </p:txBody>
+      </p:sp>
+      <p:sp>
+        <p:nvSpPr>
+          <p:cNvPr id="4" name="Rectangle 3"/>
+          <p:cNvSpPr/>
+          <p:nvPr/>
+        </p:nvSpPr>
+        <p:spPr>
+          <a:xfrm>
+            <a:off x="1016000" y="1422400"/>
+            <a:ext cx="762000" cy="25400"/>
+          </a:xfrm>
+          <a:prstGeom prst="rect">
+            <a:avLst/>
+          </a:prstGeom>
+          <a:solidFill>
+            <a:srgbClr val="C9A84C"/>
+          </a:solidFill>
+          <a:ln>
+            <a:noFill/>
+          </a:ln>
+          <a:effectLst/>
+        </p:spPr>
+        <p:style>
+          <a:lnRef idx="1">
+            <a:schemeClr val="accent1"/>
+          </a:lnRef>
+          <a:fillRef idx="3">
+            <a:schemeClr val="accent1"/>
+          </a:fillRef>
+          <a:effectRef idx="2">
+            <a:schemeClr val="accent1"/>
+          </a:effectRef>
+          <a:fontRef idx="minor">
+            <a:schemeClr val="lt1"/>
+          </a:fontRef>
+        </p:style>
+        <p:txBody>
+          <a:bodyPr rtlCol="0" anchor="ctr"/>
+          <a:lstStyle/>
+          <a:p>
+            <a:pPr algn="ctr"/>
+          </a:p>
+        </p:txBody>
+      </p:sp>
+      <p:sp>
+        <p:nvSpPr>
+          <p:cNvPr id="5" name="TextBox 4"/>
+          <p:cNvSpPr txBox="1"/>
+          <p:nvPr/>
+        </p:nvSpPr>
+        <p:spPr>
+          <a:xfrm>
+            <a:off x="1016000" y="1933956"/>
             <a:ext cx="10160000" cy="1524000"/>
           </a:xfrm>
           <a:prstGeom prst="rect">
@@ -4449,41 +4594,114 @@
               </a:lnSpc>
             </a:pPr>
             <a:r>
-              <a:rPr sz="4800" b="1" i="0">
+              <a:rPr sz="3900" b="1" i="0">
                 <a:solidFill>
-                  <a:srgbClr val="F5F1E8"/>
+                  <a:srgbClr val="112345"/>
                 </a:solidFill>
                 <a:latin typeface="Montserrat"/>
                 <a:ea typeface="Montserrat"/>
                 <a:cs typeface="Montserrat"/>
               </a:rPr>
-              <a:t>RESPECTED.</a:t>
-            </a:r>
-            <a:br/>
-            <a:r>
-              <a:rPr sz="4800" b="1" i="0">
+              <a:t>Same career. Two ways to hear it.</a:t>
+            </a:r>
+          </a:p>
+        </p:txBody>
+      </p:sp>
+      <p:sp>
+        <p:nvSpPr>
+          <p:cNvPr id="6" name="Rectangle 5"/>
+          <p:cNvSpPr/>
+          <p:nvPr/>
+        </p:nvSpPr>
+        <p:spPr>
+          <a:xfrm>
+            <a:off x="1016000" y="2895092"/>
+            <a:ext cx="4826000" cy="25400"/>
+          </a:xfrm>
+          <a:prstGeom prst="rect">
+            <a:avLst/>
+          </a:prstGeom>
+          <a:solidFill>
+            <a:srgbClr val="C9A84C"/>
+          </a:solidFill>
+          <a:ln>
+            <a:noFill/>
+          </a:ln>
+          <a:effectLst/>
+        </p:spPr>
+        <p:style>
+          <a:lnRef idx="1">
+            <a:schemeClr val="accent1"/>
+          </a:lnRef>
+          <a:fillRef idx="3">
+            <a:schemeClr val="accent1"/>
+          </a:fillRef>
+          <a:effectRef idx="2">
+            <a:schemeClr val="accent1"/>
+          </a:effectRef>
+          <a:fontRef idx="minor">
+            <a:schemeClr val="lt1"/>
+          </a:fontRef>
+        </p:style>
+        <p:txBody>
+          <a:bodyPr rtlCol="0" anchor="ctr"/>
+          <a:lstStyle/>
+          <a:p>
+            <a:pPr algn="ctr"/>
+          </a:p>
+        </p:txBody>
+      </p:sp>
+      <p:sp>
+        <p:nvSpPr>
+          <p:cNvPr id="7" name="TextBox 6"/>
+          <p:cNvSpPr txBox="1"/>
+          <p:nvPr/>
+        </p:nvSpPr>
+        <p:spPr>
+          <a:xfrm>
+            <a:off x="1016000" y="3110992"/>
+            <a:ext cx="4826000" cy="1524000"/>
+          </a:xfrm>
+          <a:prstGeom prst="rect">
+            <a:avLst/>
+          </a:prstGeom>
+          <a:noFill/>
+        </p:spPr>
+        <p:txBody>
+          <a:bodyPr wrap="square" lIns="0" rIns="0" tIns="0" bIns="0" anchor="t">
+            <a:spAutoFit/>
+          </a:bodyPr>
+          <a:lstStyle/>
+          <a:p>
+            <a:pPr algn="l">
+              <a:lnSpc>
+                <a:spcPct val="114000"/>
+              </a:lnSpc>
+            </a:pPr>
+            <a:r>
+              <a:rPr sz="2900" b="1" i="0">
                 <a:solidFill>
-                  <a:srgbClr val="F5F1E8"/>
+                  <a:srgbClr val="112345"/>
                 </a:solidFill>
                 <a:latin typeface="Montserrat"/>
                 <a:ea typeface="Montserrat"/>
                 <a:cs typeface="Montserrat"/>
               </a:rPr>
-              <a:t>BUT HARD TO PLACE.</a:t>
-            </a:r>
-          </a:p>
-        </p:txBody>
-      </p:sp>
-      <p:sp>
-        <p:nvSpPr>
-          <p:cNvPr id="4" name="TextBox 3"/>
+              <a:t>THE RESUME VERSION</a:t>
+            </a:r>
+          </a:p>
+        </p:txBody>
+      </p:sp>
+      <p:sp>
+        <p:nvSpPr>
+          <p:cNvPr id="8" name="TextBox 7"/>
           <p:cNvSpPr txBox="1"/>
           <p:nvPr/>
         </p:nvSpPr>
         <p:spPr>
           <a:xfrm>
-            <a:off x="1016000" y="3950144"/>
-            <a:ext cx="10160000" cy="1524000"/>
+            <a:off x="1016000" y="3657854"/>
+            <a:ext cx="4826000" cy="1524000"/>
           </a:xfrm>
           <a:prstGeom prst="rect">
             <a:avLst/>
@@ -4498,19 +4716,186 @@
           <a:p>
             <a:pPr algn="l">
               <a:lnSpc>
-                <a:spcPct val="135000"/>
+                <a:spcPct val="134000"/>
               </a:lnSpc>
             </a:pPr>
             <a:r>
-              <a:rPr sz="2700" b="0" i="0">
+              <a:rPr sz="2500" b="0" i="0">
                 <a:solidFill>
-                  <a:srgbClr val="B9C3D2"/>
+                  <a:srgbClr val="5A6B82"/>
                 </a:solidFill>
                 <a:latin typeface="DM Sans"/>
                 <a:ea typeface="DM Sans"/>
                 <a:cs typeface="DM Sans"/>
               </a:rPr>
-              <a:t>They still may not know what to do with you.</a:t>
+              <a:t>Where I have been.</a:t>
+            </a:r>
+          </a:p>
+        </p:txBody>
+      </p:sp>
+      <p:sp>
+        <p:nvSpPr>
+          <p:cNvPr id="9" name="Rectangle 8"/>
+          <p:cNvSpPr/>
+          <p:nvPr/>
+        </p:nvSpPr>
+        <p:spPr>
+          <a:xfrm>
+            <a:off x="6350000" y="2895092"/>
+            <a:ext cx="4826000" cy="25400"/>
+          </a:xfrm>
+          <a:prstGeom prst="rect">
+            <a:avLst/>
+          </a:prstGeom>
+          <a:solidFill>
+            <a:srgbClr val="C9A84C"/>
+          </a:solidFill>
+          <a:ln>
+            <a:noFill/>
+          </a:ln>
+          <a:effectLst/>
+        </p:spPr>
+        <p:style>
+          <a:lnRef idx="1">
+            <a:schemeClr val="accent1"/>
+          </a:lnRef>
+          <a:fillRef idx="3">
+            <a:schemeClr val="accent1"/>
+          </a:fillRef>
+          <a:effectRef idx="2">
+            <a:schemeClr val="accent1"/>
+          </a:effectRef>
+          <a:fontRef idx="minor">
+            <a:schemeClr val="lt1"/>
+          </a:fontRef>
+        </p:style>
+        <p:txBody>
+          <a:bodyPr rtlCol="0" anchor="ctr"/>
+          <a:lstStyle/>
+          <a:p>
+            <a:pPr algn="ctr"/>
+          </a:p>
+        </p:txBody>
+      </p:sp>
+      <p:sp>
+        <p:nvSpPr>
+          <p:cNvPr id="10" name="TextBox 9"/>
+          <p:cNvSpPr txBox="1"/>
+          <p:nvPr/>
+        </p:nvSpPr>
+        <p:spPr>
+          <a:xfrm>
+            <a:off x="6350000" y="3110992"/>
+            <a:ext cx="4826000" cy="1524000"/>
+          </a:xfrm>
+          <a:prstGeom prst="rect">
+            <a:avLst/>
+          </a:prstGeom>
+          <a:noFill/>
+        </p:spPr>
+        <p:txBody>
+          <a:bodyPr wrap="square" lIns="0" rIns="0" tIns="0" bIns="0" anchor="t">
+            <a:spAutoFit/>
+          </a:bodyPr>
+          <a:lstStyle/>
+          <a:p>
+            <a:pPr algn="l">
+              <a:lnSpc>
+                <a:spcPct val="114000"/>
+              </a:lnSpc>
+            </a:pPr>
+            <a:r>
+              <a:rPr sz="2900" b="1" i="0">
+                <a:solidFill>
+                  <a:srgbClr val="112345"/>
+                </a:solidFill>
+                <a:latin typeface="Montserrat"/>
+                <a:ea typeface="Montserrat"/>
+                <a:cs typeface="Montserrat"/>
+              </a:rPr>
+              <a:t>THE CLAIM</a:t>
+            </a:r>
+          </a:p>
+        </p:txBody>
+      </p:sp>
+      <p:sp>
+        <p:nvSpPr>
+          <p:cNvPr id="11" name="TextBox 10"/>
+          <p:cNvSpPr txBox="1"/>
+          <p:nvPr/>
+        </p:nvSpPr>
+        <p:spPr>
+          <a:xfrm>
+            <a:off x="6350000" y="3657854"/>
+            <a:ext cx="4826000" cy="1524000"/>
+          </a:xfrm>
+          <a:prstGeom prst="rect">
+            <a:avLst/>
+          </a:prstGeom>
+          <a:noFill/>
+        </p:spPr>
+        <p:txBody>
+          <a:bodyPr wrap="square" lIns="0" rIns="0" tIns="0" bIns="0" anchor="t">
+            <a:spAutoFit/>
+          </a:bodyPr>
+          <a:lstStyle/>
+          <a:p>
+            <a:pPr algn="l">
+              <a:lnSpc>
+                <a:spcPct val="134000"/>
+              </a:lnSpc>
+            </a:pPr>
+            <a:r>
+              <a:rPr sz="2500" b="0" i="0">
+                <a:solidFill>
+                  <a:srgbClr val="5A6B82"/>
+                </a:solidFill>
+                <a:latin typeface="DM Sans"/>
+                <a:ea typeface="DM Sans"/>
+                <a:cs typeface="DM Sans"/>
+              </a:rPr>
+              <a:t>What I get brought in to do.</a:t>
+            </a:r>
+          </a:p>
+        </p:txBody>
+      </p:sp>
+      <p:sp>
+        <p:nvSpPr>
+          <p:cNvPr id="12" name="TextBox 11"/>
+          <p:cNvSpPr txBox="1"/>
+          <p:nvPr/>
+        </p:nvSpPr>
+        <p:spPr>
+          <a:xfrm>
+            <a:off x="1016000" y="4451604"/>
+            <a:ext cx="10160000" cy="1524000"/>
+          </a:xfrm>
+          <a:prstGeom prst="rect">
+            <a:avLst/>
+          </a:prstGeom>
+          <a:noFill/>
+        </p:spPr>
+        <p:txBody>
+          <a:bodyPr wrap="square" lIns="0" rIns="0" tIns="0" bIns="0" anchor="t">
+            <a:spAutoFit/>
+          </a:bodyPr>
+          <a:lstStyle/>
+          <a:p>
+            <a:pPr algn="l">
+              <a:lnSpc>
+                <a:spcPct val="120000"/>
+              </a:lnSpc>
+            </a:pPr>
+            <a:r>
+              <a:rPr sz="2100" b="1" i="0">
+                <a:solidFill>
+                  <a:srgbClr val="C9A84C"/>
+                </a:solidFill>
+                <a:latin typeface="Montserrat"/>
+                <a:ea typeface="Montserrat"/>
+                <a:cs typeface="Montserrat"/>
+              </a:rPr>
+              <a:t>One makes them work out the connection. The other does not.</a:t>
             </a:r>
           </a:p>
         </p:txBody>
@@ -4825,7 +5210,7 @@
                 <a:ea typeface="Montserrat"/>
                 <a:cs typeface="Montserrat"/>
               </a:rPr>
-              <a:t>THE SORTING MECHANISM</a:t>
+              <a:t>THE ONE-LINE TEST</a:t>
             </a:r>
           </a:p>
         </p:txBody>
@@ -4882,7 +5267,7 @@
         </p:nvSpPr>
         <p:spPr>
           <a:xfrm>
-            <a:off x="1016000" y="2556256"/>
+            <a:off x="1016000" y="1810004"/>
             <a:ext cx="698500" cy="1524000"/>
           </a:xfrm>
           <a:prstGeom prst="rect">
@@ -4923,7 +5308,7 @@
         </p:nvSpPr>
         <p:spPr>
           <a:xfrm>
-            <a:off x="1854200" y="2480056"/>
+            <a:off x="1854200" y="1733804"/>
             <a:ext cx="9321800" cy="1524000"/>
           </a:xfrm>
           <a:prstGeom prst="rect">
@@ -4943,7 +5328,7 @@
               </a:lnSpc>
             </a:pPr>
             <a:r>
-              <a:rPr sz="2900" b="1" i="0">
+              <a:rPr sz="3800" b="1" i="0">
                 <a:solidFill>
                   <a:srgbClr val="112345"/>
                 </a:solidFill>
@@ -4951,7 +5336,7 @@
                 <a:ea typeface="Montserrat"/>
                 <a:cs typeface="Montserrat"/>
               </a:rPr>
-              <a:t>FIVE POSSIBLE CATEGORIES</a:t>
+              <a:t>CLAIM</a:t>
             </a:r>
           </a:p>
         </p:txBody>
@@ -4964,7 +5349,7 @@
         </p:nvSpPr>
         <p:spPr>
           <a:xfrm>
-            <a:off x="1016000" y="3222752"/>
+            <a:off x="1016000" y="2604516"/>
             <a:ext cx="698500" cy="1524000"/>
           </a:xfrm>
           <a:prstGeom prst="rect">
@@ -5005,7 +5390,7 @@
         </p:nvSpPr>
         <p:spPr>
           <a:xfrm>
-            <a:off x="1854200" y="3146552"/>
+            <a:off x="1854200" y="2528316"/>
             <a:ext cx="9321800" cy="1524000"/>
           </a:xfrm>
           <a:prstGeom prst="rect">
@@ -5025,7 +5410,7 @@
               </a:lnSpc>
             </a:pPr>
             <a:r>
-              <a:rPr sz="2900" b="1" i="0">
+              <a:rPr sz="3800" b="1" i="0">
                 <a:solidFill>
                   <a:srgbClr val="112345"/>
                 </a:solidFill>
@@ -5033,7 +5418,7 @@
                 <a:ea typeface="Montserrat"/>
                 <a:cs typeface="Montserrat"/>
               </a:rPr>
-              <a:t>THEY PICK THE NEAREST ONE</a:t>
+              <a:t>SPINE</a:t>
             </a:r>
           </a:p>
         </p:txBody>
@@ -5046,7 +5431,7 @@
         </p:nvSpPr>
         <p:spPr>
           <a:xfrm>
-            <a:off x="1016000" y="3889248"/>
+            <a:off x="1016000" y="3399028"/>
             <a:ext cx="698500" cy="1524000"/>
           </a:xfrm>
           <a:prstGeom prst="rect">
@@ -5087,7 +5472,7 @@
         </p:nvSpPr>
         <p:spPr>
           <a:xfrm>
-            <a:off x="1854200" y="3813048"/>
+            <a:off x="1854200" y="3322828"/>
             <a:ext cx="9321800" cy="1524000"/>
           </a:xfrm>
           <a:prstGeom prst="rect">
@@ -5107,7 +5492,7 @@
               </a:lnSpc>
             </a:pPr>
             <a:r>
-              <a:rPr sz="2900" b="1" i="0">
+              <a:rPr sz="3800" b="1" i="0">
                 <a:solidFill>
                   <a:srgbClr val="112345"/>
                 </a:solidFill>
@@ -5115,7 +5500,48 @@
                 <a:ea typeface="Montserrat"/>
                 <a:cs typeface="Montserrat"/>
               </a:rPr>
-              <a:t>A SMALLER BOX THAN YOU</a:t>
+              <a:t>RECEIPTS</a:t>
+            </a:r>
+          </a:p>
+        </p:txBody>
+      </p:sp>
+      <p:sp>
+        <p:nvSpPr>
+          <p:cNvPr id="11" name="TextBox 10"/>
+          <p:cNvSpPr txBox="1"/>
+          <p:nvPr/>
+        </p:nvSpPr>
+        <p:spPr>
+          <a:xfrm>
+            <a:off x="1016000" y="4257040"/>
+            <a:ext cx="10160000" cy="1524000"/>
+          </a:xfrm>
+          <a:prstGeom prst="rect">
+            <a:avLst/>
+          </a:prstGeom>
+          <a:noFill/>
+        </p:spPr>
+        <p:txBody>
+          <a:bodyPr wrap="square" lIns="0" rIns="0" tIns="0" bIns="0" anchor="t">
+            <a:spAutoFit/>
+          </a:bodyPr>
+          <a:lstStyle/>
+          <a:p>
+            <a:pPr algn="l">
+              <a:lnSpc>
+                <a:spcPct val="134000"/>
+              </a:lnSpc>
+            </a:pPr>
+            <a:r>
+              <a:rPr sz="2100" b="0" i="0">
+                <a:solidFill>
+                  <a:srgbClr val="5A6B82"/>
+                </a:solidFill>
+                <a:latin typeface="DM Sans"/>
+                <a:ea typeface="DM Sans"/>
+                <a:cs typeface="DM Sans"/>
+              </a:rPr>
+              <a:t>Claim gets you read. Spine makes you make sense. Receipts make you believable.</a:t>
             </a:r>
           </a:p>
         </p:txBody>
@@ -5218,7 +5644,7 @@
                 <a:ea typeface="Montserrat"/>
                 <a:cs typeface="Montserrat"/>
               </a:rPr>
-              <a:t>THE ONE-LINE TEST</a:t>
+              <a:t>CHOOSING YOUR CLAIM</a:t>
             </a:r>
           </a:p>
         </p:txBody>
@@ -5275,8 +5701,93 @@
         </p:nvSpPr>
         <p:spPr>
           <a:xfrm>
-            <a:off x="1016000" y="1810004"/>
-            <a:ext cx="698500" cy="1524000"/>
+            <a:off x="1016000" y="1933956"/>
+            <a:ext cx="10160000" cy="1524000"/>
+          </a:xfrm>
+          <a:prstGeom prst="rect">
+            <a:avLst/>
+          </a:prstGeom>
+          <a:noFill/>
+        </p:spPr>
+        <p:txBody>
+          <a:bodyPr wrap="square" lIns="0" rIns="0" tIns="0" bIns="0" anchor="t">
+            <a:spAutoFit/>
+          </a:bodyPr>
+          <a:lstStyle/>
+          <a:p>
+            <a:pPr algn="l">
+              <a:lnSpc>
+                <a:spcPct val="112000"/>
+              </a:lnSpc>
+            </a:pPr>
+            <a:r>
+              <a:rPr sz="3900" b="1" i="0">
+                <a:solidFill>
+                  <a:srgbClr val="112345"/>
+                </a:solidFill>
+                <a:latin typeface="Montserrat"/>
+                <a:ea typeface="Montserrat"/>
+                <a:cs typeface="Montserrat"/>
+              </a:rPr>
+              <a:t>Sharper is not always better.</a:t>
+            </a:r>
+          </a:p>
+        </p:txBody>
+      </p:sp>
+      <p:sp>
+        <p:nvSpPr>
+          <p:cNvPr id="6" name="Rectangle 5"/>
+          <p:cNvSpPr/>
+          <p:nvPr/>
+        </p:nvSpPr>
+        <p:spPr>
+          <a:xfrm>
+            <a:off x="1016000" y="2895092"/>
+            <a:ext cx="4826000" cy="25400"/>
+          </a:xfrm>
+          <a:prstGeom prst="rect">
+            <a:avLst/>
+          </a:prstGeom>
+          <a:solidFill>
+            <a:srgbClr val="C9A84C"/>
+          </a:solidFill>
+          <a:ln>
+            <a:noFill/>
+          </a:ln>
+          <a:effectLst/>
+        </p:spPr>
+        <p:style>
+          <a:lnRef idx="1">
+            <a:schemeClr val="accent1"/>
+          </a:lnRef>
+          <a:fillRef idx="3">
+            <a:schemeClr val="accent1"/>
+          </a:fillRef>
+          <a:effectRef idx="2">
+            <a:schemeClr val="accent1"/>
+          </a:effectRef>
+          <a:fontRef idx="minor">
+            <a:schemeClr val="lt1"/>
+          </a:fontRef>
+        </p:style>
+        <p:txBody>
+          <a:bodyPr rtlCol="0" anchor="ctr"/>
+          <a:lstStyle/>
+          <a:p>
+            <a:pPr algn="ctr"/>
+          </a:p>
+        </p:txBody>
+      </p:sp>
+      <p:sp>
+        <p:nvSpPr>
+          <p:cNvPr id="7" name="TextBox 6"/>
+          <p:cNvSpPr txBox="1"/>
+          <p:nvPr/>
+        </p:nvSpPr>
+        <p:spPr>
+          <a:xfrm>
+            <a:off x="1016000" y="3110992"/>
+            <a:ext cx="4826000" cy="1524000"/>
           </a:xfrm>
           <a:prstGeom prst="rect">
             <a:avLst/>
@@ -5295,7 +5806,215 @@
               </a:lnSpc>
             </a:pPr>
             <a:r>
-              <a:rPr sz="2000" b="1" i="0" spc="75">
+              <a:rPr sz="2900" b="1" i="0">
+                <a:solidFill>
+                  <a:srgbClr val="112345"/>
+                </a:solidFill>
+                <a:latin typeface="Montserrat"/>
+                <a:ea typeface="Montserrat"/>
+                <a:cs typeface="Montserrat"/>
+              </a:rPr>
+              <a:t>SHARPER</a:t>
+            </a:r>
+          </a:p>
+        </p:txBody>
+      </p:sp>
+      <p:sp>
+        <p:nvSpPr>
+          <p:cNvPr id="8" name="TextBox 7"/>
+          <p:cNvSpPr txBox="1"/>
+          <p:nvPr/>
+        </p:nvSpPr>
+        <p:spPr>
+          <a:xfrm>
+            <a:off x="1016000" y="3657854"/>
+            <a:ext cx="4826000" cy="1524000"/>
+          </a:xfrm>
+          <a:prstGeom prst="rect">
+            <a:avLst/>
+          </a:prstGeom>
+          <a:noFill/>
+        </p:spPr>
+        <p:txBody>
+          <a:bodyPr wrap="square" lIns="0" rIns="0" tIns="0" bIns="0" anchor="t">
+            <a:spAutoFit/>
+          </a:bodyPr>
+          <a:lstStyle/>
+          <a:p>
+            <a:pPr algn="l">
+              <a:lnSpc>
+                <a:spcPct val="134000"/>
+              </a:lnSpc>
+            </a:pPr>
+            <a:r>
+              <a:rPr sz="2500" b="0" i="0">
+                <a:solidFill>
+                  <a:srgbClr val="5A6B82"/>
+                </a:solidFill>
+                <a:latin typeface="DM Sans"/>
+                <a:ea typeface="DM Sans"/>
+                <a:cs typeface="DM Sans"/>
+              </a:rPr>
+              <a:t>Sounds stronger.</a:t>
+            </a:r>
+          </a:p>
+        </p:txBody>
+      </p:sp>
+      <p:sp>
+        <p:nvSpPr>
+          <p:cNvPr id="9" name="Rectangle 8"/>
+          <p:cNvSpPr/>
+          <p:nvPr/>
+        </p:nvSpPr>
+        <p:spPr>
+          <a:xfrm>
+            <a:off x="6350000" y="2895092"/>
+            <a:ext cx="4826000" cy="25400"/>
+          </a:xfrm>
+          <a:prstGeom prst="rect">
+            <a:avLst/>
+          </a:prstGeom>
+          <a:solidFill>
+            <a:srgbClr val="C9A84C"/>
+          </a:solidFill>
+          <a:ln>
+            <a:noFill/>
+          </a:ln>
+          <a:effectLst/>
+        </p:spPr>
+        <p:style>
+          <a:lnRef idx="1">
+            <a:schemeClr val="accent1"/>
+          </a:lnRef>
+          <a:fillRef idx="3">
+            <a:schemeClr val="accent1"/>
+          </a:fillRef>
+          <a:effectRef idx="2">
+            <a:schemeClr val="accent1"/>
+          </a:effectRef>
+          <a:fontRef idx="minor">
+            <a:schemeClr val="lt1"/>
+          </a:fontRef>
+        </p:style>
+        <p:txBody>
+          <a:bodyPr rtlCol="0" anchor="ctr"/>
+          <a:lstStyle/>
+          <a:p>
+            <a:pPr algn="ctr"/>
+          </a:p>
+        </p:txBody>
+      </p:sp>
+      <p:sp>
+        <p:nvSpPr>
+          <p:cNvPr id="10" name="TextBox 9"/>
+          <p:cNvSpPr txBox="1"/>
+          <p:nvPr/>
+        </p:nvSpPr>
+        <p:spPr>
+          <a:xfrm>
+            <a:off x="6350000" y="3110992"/>
+            <a:ext cx="4826000" cy="1524000"/>
+          </a:xfrm>
+          <a:prstGeom prst="rect">
+            <a:avLst/>
+          </a:prstGeom>
+          <a:noFill/>
+        </p:spPr>
+        <p:txBody>
+          <a:bodyPr wrap="square" lIns="0" rIns="0" tIns="0" bIns="0" anchor="t">
+            <a:spAutoFit/>
+          </a:bodyPr>
+          <a:lstStyle/>
+          <a:p>
+            <a:pPr algn="l">
+              <a:lnSpc>
+                <a:spcPct val="114000"/>
+              </a:lnSpc>
+            </a:pPr>
+            <a:r>
+              <a:rPr sz="2900" b="1" i="0">
+                <a:solidFill>
+                  <a:srgbClr val="112345"/>
+                </a:solidFill>
+                <a:latin typeface="Montserrat"/>
+                <a:ea typeface="Montserrat"/>
+                <a:cs typeface="Montserrat"/>
+              </a:rPr>
+              <a:t>DEFENSIBLE</a:t>
+            </a:r>
+          </a:p>
+        </p:txBody>
+      </p:sp>
+      <p:sp>
+        <p:nvSpPr>
+          <p:cNvPr id="11" name="TextBox 10"/>
+          <p:cNvSpPr txBox="1"/>
+          <p:nvPr/>
+        </p:nvSpPr>
+        <p:spPr>
+          <a:xfrm>
+            <a:off x="6350000" y="3657854"/>
+            <a:ext cx="4826000" cy="1524000"/>
+          </a:xfrm>
+          <a:prstGeom prst="rect">
+            <a:avLst/>
+          </a:prstGeom>
+          <a:noFill/>
+        </p:spPr>
+        <p:txBody>
+          <a:bodyPr wrap="square" lIns="0" rIns="0" tIns="0" bIns="0" anchor="t">
+            <a:spAutoFit/>
+          </a:bodyPr>
+          <a:lstStyle/>
+          <a:p>
+            <a:pPr algn="l">
+              <a:lnSpc>
+                <a:spcPct val="134000"/>
+              </a:lnSpc>
+            </a:pPr>
+            <a:r>
+              <a:rPr sz="2500" b="0" i="0">
+                <a:solidFill>
+                  <a:srgbClr val="5A6B82"/>
+                </a:solidFill>
+                <a:latin typeface="DM Sans"/>
+                <a:ea typeface="DM Sans"/>
+                <a:cs typeface="DM Sans"/>
+              </a:rPr>
+              <a:t>Survives “show me.”</a:t>
+            </a:r>
+          </a:p>
+        </p:txBody>
+      </p:sp>
+      <p:sp>
+        <p:nvSpPr>
+          <p:cNvPr id="12" name="TextBox 11"/>
+          <p:cNvSpPr txBox="1"/>
+          <p:nvPr/>
+        </p:nvSpPr>
+        <p:spPr>
+          <a:xfrm>
+            <a:off x="1016000" y="4451604"/>
+            <a:ext cx="10160000" cy="1524000"/>
+          </a:xfrm>
+          <a:prstGeom prst="rect">
+            <a:avLst/>
+          </a:prstGeom>
+          <a:noFill/>
+        </p:spPr>
+        <p:txBody>
+          <a:bodyPr wrap="square" lIns="0" rIns="0" tIns="0" bIns="0" anchor="t">
+            <a:spAutoFit/>
+          </a:bodyPr>
+          <a:lstStyle/>
+          <a:p>
+            <a:pPr algn="l">
+              <a:lnSpc>
+                <a:spcPct val="120000"/>
+              </a:lnSpc>
+            </a:pPr>
+            <a:r>
+              <a:rPr sz="2100" b="1" i="0">
                 <a:solidFill>
                   <a:srgbClr val="C9A84C"/>
                 </a:solidFill>
@@ -5303,253 +6022,7 @@
                 <a:ea typeface="Montserrat"/>
                 <a:cs typeface="Montserrat"/>
               </a:rPr>
-              <a:t>01</a:t>
-            </a:r>
-          </a:p>
-        </p:txBody>
-      </p:sp>
-      <p:sp>
-        <p:nvSpPr>
-          <p:cNvPr id="6" name="TextBox 5"/>
-          <p:cNvSpPr txBox="1"/>
-          <p:nvPr/>
-        </p:nvSpPr>
-        <p:spPr>
-          <a:xfrm>
-            <a:off x="1854200" y="1733804"/>
-            <a:ext cx="9321800" cy="1524000"/>
-          </a:xfrm>
-          <a:prstGeom prst="rect">
-            <a:avLst/>
-          </a:prstGeom>
-          <a:noFill/>
-        </p:spPr>
-        <p:txBody>
-          <a:bodyPr wrap="square" lIns="0" rIns="0" tIns="0" bIns="0" anchor="t">
-            <a:spAutoFit/>
-          </a:bodyPr>
-          <a:lstStyle/>
-          <a:p>
-            <a:pPr algn="l">
-              <a:lnSpc>
-                <a:spcPct val="112000"/>
-              </a:lnSpc>
-            </a:pPr>
-            <a:r>
-              <a:rPr sz="3800" b="1" i="0">
-                <a:solidFill>
-                  <a:srgbClr val="112345"/>
-                </a:solidFill>
-                <a:latin typeface="Montserrat"/>
-                <a:ea typeface="Montserrat"/>
-                <a:cs typeface="Montserrat"/>
-              </a:rPr>
-              <a:t>CLAIM</a:t>
-            </a:r>
-          </a:p>
-        </p:txBody>
-      </p:sp>
-      <p:sp>
-        <p:nvSpPr>
-          <p:cNvPr id="7" name="TextBox 6"/>
-          <p:cNvSpPr txBox="1"/>
-          <p:nvPr/>
-        </p:nvSpPr>
-        <p:spPr>
-          <a:xfrm>
-            <a:off x="1016000" y="2604516"/>
-            <a:ext cx="698500" cy="1524000"/>
-          </a:xfrm>
-          <a:prstGeom prst="rect">
-            <a:avLst/>
-          </a:prstGeom>
-          <a:noFill/>
-        </p:spPr>
-        <p:txBody>
-          <a:bodyPr wrap="square" lIns="0" rIns="0" tIns="0" bIns="0" anchor="t">
-            <a:spAutoFit/>
-          </a:bodyPr>
-          <a:lstStyle/>
-          <a:p>
-            <a:pPr algn="l">
-              <a:lnSpc>
-                <a:spcPct val="114000"/>
-              </a:lnSpc>
-            </a:pPr>
-            <a:r>
-              <a:rPr sz="2000" b="1" i="0" spc="75">
-                <a:solidFill>
-                  <a:srgbClr val="C9A84C"/>
-                </a:solidFill>
-                <a:latin typeface="Montserrat"/>
-                <a:ea typeface="Montserrat"/>
-                <a:cs typeface="Montserrat"/>
-              </a:rPr>
-              <a:t>02</a:t>
-            </a:r>
-          </a:p>
-        </p:txBody>
-      </p:sp>
-      <p:sp>
-        <p:nvSpPr>
-          <p:cNvPr id="8" name="TextBox 7"/>
-          <p:cNvSpPr txBox="1"/>
-          <p:nvPr/>
-        </p:nvSpPr>
-        <p:spPr>
-          <a:xfrm>
-            <a:off x="1854200" y="2528316"/>
-            <a:ext cx="9321800" cy="1524000"/>
-          </a:xfrm>
-          <a:prstGeom prst="rect">
-            <a:avLst/>
-          </a:prstGeom>
-          <a:noFill/>
-        </p:spPr>
-        <p:txBody>
-          <a:bodyPr wrap="square" lIns="0" rIns="0" tIns="0" bIns="0" anchor="t">
-            <a:spAutoFit/>
-          </a:bodyPr>
-          <a:lstStyle/>
-          <a:p>
-            <a:pPr algn="l">
-              <a:lnSpc>
-                <a:spcPct val="112000"/>
-              </a:lnSpc>
-            </a:pPr>
-            <a:r>
-              <a:rPr sz="3800" b="1" i="0">
-                <a:solidFill>
-                  <a:srgbClr val="112345"/>
-                </a:solidFill>
-                <a:latin typeface="Montserrat"/>
-                <a:ea typeface="Montserrat"/>
-                <a:cs typeface="Montserrat"/>
-              </a:rPr>
-              <a:t>SPINE</a:t>
-            </a:r>
-          </a:p>
-        </p:txBody>
-      </p:sp>
-      <p:sp>
-        <p:nvSpPr>
-          <p:cNvPr id="9" name="TextBox 8"/>
-          <p:cNvSpPr txBox="1"/>
-          <p:nvPr/>
-        </p:nvSpPr>
-        <p:spPr>
-          <a:xfrm>
-            <a:off x="1016000" y="3399028"/>
-            <a:ext cx="698500" cy="1524000"/>
-          </a:xfrm>
-          <a:prstGeom prst="rect">
-            <a:avLst/>
-          </a:prstGeom>
-          <a:noFill/>
-        </p:spPr>
-        <p:txBody>
-          <a:bodyPr wrap="square" lIns="0" rIns="0" tIns="0" bIns="0" anchor="t">
-            <a:spAutoFit/>
-          </a:bodyPr>
-          <a:lstStyle/>
-          <a:p>
-            <a:pPr algn="l">
-              <a:lnSpc>
-                <a:spcPct val="114000"/>
-              </a:lnSpc>
-            </a:pPr>
-            <a:r>
-              <a:rPr sz="2000" b="1" i="0" spc="75">
-                <a:solidFill>
-                  <a:srgbClr val="C9A84C"/>
-                </a:solidFill>
-                <a:latin typeface="Montserrat"/>
-                <a:ea typeface="Montserrat"/>
-                <a:cs typeface="Montserrat"/>
-              </a:rPr>
-              <a:t>03</a:t>
-            </a:r>
-          </a:p>
-        </p:txBody>
-      </p:sp>
-      <p:sp>
-        <p:nvSpPr>
-          <p:cNvPr id="10" name="TextBox 9"/>
-          <p:cNvSpPr txBox="1"/>
-          <p:nvPr/>
-        </p:nvSpPr>
-        <p:spPr>
-          <a:xfrm>
-            <a:off x="1854200" y="3322828"/>
-            <a:ext cx="9321800" cy="1524000"/>
-          </a:xfrm>
-          <a:prstGeom prst="rect">
-            <a:avLst/>
-          </a:prstGeom>
-          <a:noFill/>
-        </p:spPr>
-        <p:txBody>
-          <a:bodyPr wrap="square" lIns="0" rIns="0" tIns="0" bIns="0" anchor="t">
-            <a:spAutoFit/>
-          </a:bodyPr>
-          <a:lstStyle/>
-          <a:p>
-            <a:pPr algn="l">
-              <a:lnSpc>
-                <a:spcPct val="112000"/>
-              </a:lnSpc>
-            </a:pPr>
-            <a:r>
-              <a:rPr sz="3800" b="1" i="0">
-                <a:solidFill>
-                  <a:srgbClr val="112345"/>
-                </a:solidFill>
-                <a:latin typeface="Montserrat"/>
-                <a:ea typeface="Montserrat"/>
-                <a:cs typeface="Montserrat"/>
-              </a:rPr>
-              <a:t>RECEIPTS</a:t>
-            </a:r>
-          </a:p>
-        </p:txBody>
-      </p:sp>
-      <p:sp>
-        <p:nvSpPr>
-          <p:cNvPr id="11" name="TextBox 10"/>
-          <p:cNvSpPr txBox="1"/>
-          <p:nvPr/>
-        </p:nvSpPr>
-        <p:spPr>
-          <a:xfrm>
-            <a:off x="1016000" y="4257040"/>
-            <a:ext cx="10160000" cy="1524000"/>
-          </a:xfrm>
-          <a:prstGeom prst="rect">
-            <a:avLst/>
-          </a:prstGeom>
-          <a:noFill/>
-        </p:spPr>
-        <p:txBody>
-          <a:bodyPr wrap="square" lIns="0" rIns="0" tIns="0" bIns="0" anchor="t">
-            <a:spAutoFit/>
-          </a:bodyPr>
-          <a:lstStyle/>
-          <a:p>
-            <a:pPr algn="l">
-              <a:lnSpc>
-                <a:spcPct val="134000"/>
-              </a:lnSpc>
-            </a:pPr>
-            <a:r>
-              <a:rPr sz="2100" b="0" i="0">
-                <a:solidFill>
-                  <a:srgbClr val="5A6B82"/>
-                </a:solidFill>
-                <a:latin typeface="DM Sans"/>
-                <a:ea typeface="DM Sans"/>
-                <a:cs typeface="DM Sans"/>
-              </a:rPr>
-              <a:t>Claim gets you read. Spine makes you make sense. Receipts make you believable.</a:t>
+              <a:t>Choose the one you can defend.</a:t>
             </a:r>
           </a:p>
         </p:txBody>
@@ -5652,7 +6125,7 @@
                 <a:ea typeface="Montserrat"/>
                 <a:cs typeface="Montserrat"/>
               </a:rPr>
-              <a:t>CHOOSING YOUR CLAIM</a:t>
+              <a:t>THE SORTING MECHANISM</a:t>
             </a:r>
           </a:p>
         </p:txBody>
@@ -5709,8 +6182,8 @@
         </p:nvSpPr>
         <p:spPr>
           <a:xfrm>
-            <a:off x="1016000" y="1933956"/>
-            <a:ext cx="10160000" cy="1524000"/>
+            <a:off x="1016000" y="2556256"/>
+            <a:ext cx="698500" cy="1524000"/>
           </a:xfrm>
           <a:prstGeom prst="rect">
             <a:avLst/>
@@ -5725,77 +6198,33 @@
           <a:p>
             <a:pPr algn="l">
               <a:lnSpc>
-                <a:spcPct val="112000"/>
+                <a:spcPct val="114000"/>
               </a:lnSpc>
             </a:pPr>
             <a:r>
-              <a:rPr sz="3900" b="1" i="0">
+              <a:rPr sz="2000" b="1" i="0" spc="75">
                 <a:solidFill>
-                  <a:srgbClr val="112345"/>
+                  <a:srgbClr val="C9A84C"/>
                 </a:solidFill>
                 <a:latin typeface="Montserrat"/>
                 <a:ea typeface="Montserrat"/>
                 <a:cs typeface="Montserrat"/>
               </a:rPr>
-              <a:t>Sharper is not always better.</a:t>
-            </a:r>
-          </a:p>
-        </p:txBody>
-      </p:sp>
-      <p:sp>
-        <p:nvSpPr>
-          <p:cNvPr id="6" name="Rectangle 5"/>
-          <p:cNvSpPr/>
-          <p:nvPr/>
-        </p:nvSpPr>
-        <p:spPr>
-          <a:xfrm>
-            <a:off x="1016000" y="2895092"/>
-            <a:ext cx="4826000" cy="25400"/>
-          </a:xfrm>
-          <a:prstGeom prst="rect">
-            <a:avLst/>
-          </a:prstGeom>
-          <a:solidFill>
-            <a:srgbClr val="C9A84C"/>
-          </a:solidFill>
-          <a:ln>
-            <a:noFill/>
-          </a:ln>
-          <a:effectLst/>
-        </p:spPr>
-        <p:style>
-          <a:lnRef idx="1">
-            <a:schemeClr val="accent1"/>
-          </a:lnRef>
-          <a:fillRef idx="3">
-            <a:schemeClr val="accent1"/>
-          </a:fillRef>
-          <a:effectRef idx="2">
-            <a:schemeClr val="accent1"/>
-          </a:effectRef>
-          <a:fontRef idx="minor">
-            <a:schemeClr val="lt1"/>
-          </a:fontRef>
-        </p:style>
-        <p:txBody>
-          <a:bodyPr rtlCol="0" anchor="ctr"/>
-          <a:lstStyle/>
-          <a:p>
-            <a:pPr algn="ctr"/>
-          </a:p>
-        </p:txBody>
-      </p:sp>
-      <p:sp>
-        <p:nvSpPr>
-          <p:cNvPr id="7" name="TextBox 6"/>
+              <a:t>01</a:t>
+            </a:r>
+          </a:p>
+        </p:txBody>
+      </p:sp>
+      <p:sp>
+        <p:nvSpPr>
+          <p:cNvPr id="6" name="TextBox 5"/>
           <p:cNvSpPr txBox="1"/>
           <p:nvPr/>
         </p:nvSpPr>
         <p:spPr>
           <a:xfrm>
-            <a:off x="1016000" y="3110992"/>
-            <a:ext cx="4826000" cy="1524000"/>
+            <a:off x="1854200" y="2480056"/>
+            <a:ext cx="9321800" cy="1524000"/>
           </a:xfrm>
           <a:prstGeom prst="rect">
             <a:avLst/>
@@ -5810,7 +6239,7 @@
           <a:p>
             <a:pPr algn="l">
               <a:lnSpc>
-                <a:spcPct val="114000"/>
+                <a:spcPct val="112000"/>
               </a:lnSpc>
             </a:pPr>
             <a:r>
@@ -5822,7 +6251,48 @@
                 <a:ea typeface="Montserrat"/>
                 <a:cs typeface="Montserrat"/>
               </a:rPr>
-              <a:t>SHARPER</a:t>
+              <a:t>FIVE POSSIBLE CATEGORIES</a:t>
+            </a:r>
+          </a:p>
+        </p:txBody>
+      </p:sp>
+      <p:sp>
+        <p:nvSpPr>
+          <p:cNvPr id="7" name="TextBox 6"/>
+          <p:cNvSpPr txBox="1"/>
+          <p:nvPr/>
+        </p:nvSpPr>
+        <p:spPr>
+          <a:xfrm>
+            <a:off x="1016000" y="3222752"/>
+            <a:ext cx="698500" cy="1524000"/>
+          </a:xfrm>
+          <a:prstGeom prst="rect">
+            <a:avLst/>
+          </a:prstGeom>
+          <a:noFill/>
+        </p:spPr>
+        <p:txBody>
+          <a:bodyPr wrap="square" lIns="0" rIns="0" tIns="0" bIns="0" anchor="t">
+            <a:spAutoFit/>
+          </a:bodyPr>
+          <a:lstStyle/>
+          <a:p>
+            <a:pPr algn="l">
+              <a:lnSpc>
+                <a:spcPct val="114000"/>
+              </a:lnSpc>
+            </a:pPr>
+            <a:r>
+              <a:rPr sz="2000" b="1" i="0" spc="75">
+                <a:solidFill>
+                  <a:srgbClr val="C9A84C"/>
+                </a:solidFill>
+                <a:latin typeface="Montserrat"/>
+                <a:ea typeface="Montserrat"/>
+                <a:cs typeface="Montserrat"/>
+              </a:rPr>
+              <a:t>02</a:t>
             </a:r>
           </a:p>
         </p:txBody>
@@ -5835,8 +6305,8 @@
         </p:nvSpPr>
         <p:spPr>
           <a:xfrm>
-            <a:off x="1016000" y="3657854"/>
-            <a:ext cx="4826000" cy="1524000"/>
+            <a:off x="1854200" y="3146552"/>
+            <a:ext cx="9321800" cy="1524000"/>
           </a:xfrm>
           <a:prstGeom prst="rect">
             <a:avLst/>
@@ -5851,92 +6321,7 @@
           <a:p>
             <a:pPr algn="l">
               <a:lnSpc>
-                <a:spcPct val="134000"/>
-              </a:lnSpc>
-            </a:pPr>
-            <a:r>
-              <a:rPr sz="2500" b="0" i="0">
-                <a:solidFill>
-                  <a:srgbClr val="5A6B82"/>
-                </a:solidFill>
-                <a:latin typeface="DM Sans"/>
-                <a:ea typeface="DM Sans"/>
-                <a:cs typeface="DM Sans"/>
-              </a:rPr>
-              <a:t>Sounds stronger.</a:t>
-            </a:r>
-          </a:p>
-        </p:txBody>
-      </p:sp>
-      <p:sp>
-        <p:nvSpPr>
-          <p:cNvPr id="9" name="Rectangle 8"/>
-          <p:cNvSpPr/>
-          <p:nvPr/>
-        </p:nvSpPr>
-        <p:spPr>
-          <a:xfrm>
-            <a:off x="6350000" y="2895092"/>
-            <a:ext cx="4826000" cy="25400"/>
-          </a:xfrm>
-          <a:prstGeom prst="rect">
-            <a:avLst/>
-          </a:prstGeom>
-          <a:solidFill>
-            <a:srgbClr val="C9A84C"/>
-          </a:solidFill>
-          <a:ln>
-            <a:noFill/>
-          </a:ln>
-          <a:effectLst/>
-        </p:spPr>
-        <p:style>
-          <a:lnRef idx="1">
-            <a:schemeClr val="accent1"/>
-          </a:lnRef>
-          <a:fillRef idx="3">
-            <a:schemeClr val="accent1"/>
-          </a:fillRef>
-          <a:effectRef idx="2">
-            <a:schemeClr val="accent1"/>
-          </a:effectRef>
-          <a:fontRef idx="minor">
-            <a:schemeClr val="lt1"/>
-          </a:fontRef>
-        </p:style>
-        <p:txBody>
-          <a:bodyPr rtlCol="0" anchor="ctr"/>
-          <a:lstStyle/>
-          <a:p>
-            <a:pPr algn="ctr"/>
-          </a:p>
-        </p:txBody>
-      </p:sp>
-      <p:sp>
-        <p:nvSpPr>
-          <p:cNvPr id="10" name="TextBox 9"/>
-          <p:cNvSpPr txBox="1"/>
-          <p:nvPr/>
-        </p:nvSpPr>
-        <p:spPr>
-          <a:xfrm>
-            <a:off x="6350000" y="3110992"/>
-            <a:ext cx="4826000" cy="1524000"/>
-          </a:xfrm>
-          <a:prstGeom prst="rect">
-            <a:avLst/>
-          </a:prstGeom>
-          <a:noFill/>
-        </p:spPr>
-        <p:txBody>
-          <a:bodyPr wrap="square" lIns="0" rIns="0" tIns="0" bIns="0" anchor="t">
-            <a:spAutoFit/>
-          </a:bodyPr>
-          <a:lstStyle/>
-          <a:p>
-            <a:pPr algn="l">
-              <a:lnSpc>
-                <a:spcPct val="114000"/>
+                <a:spcPct val="112000"/>
               </a:lnSpc>
             </a:pPr>
             <a:r>
@@ -5948,21 +6333,21 @@
                 <a:ea typeface="Montserrat"/>
                 <a:cs typeface="Montserrat"/>
               </a:rPr>
-              <a:t>DEFENSIBLE</a:t>
-            </a:r>
-          </a:p>
-        </p:txBody>
-      </p:sp>
-      <p:sp>
-        <p:nvSpPr>
-          <p:cNvPr id="11" name="TextBox 10"/>
+              <a:t>THEY PICK THE NEAREST ONE</a:t>
+            </a:r>
+          </a:p>
+        </p:txBody>
+      </p:sp>
+      <p:sp>
+        <p:nvSpPr>
+          <p:cNvPr id="9" name="TextBox 8"/>
           <p:cNvSpPr txBox="1"/>
           <p:nvPr/>
         </p:nvSpPr>
         <p:spPr>
           <a:xfrm>
-            <a:off x="6350000" y="3657854"/>
-            <a:ext cx="4826000" cy="1524000"/>
+            <a:off x="1016000" y="3889248"/>
+            <a:ext cx="698500" cy="1524000"/>
           </a:xfrm>
           <a:prstGeom prst="rect">
             <a:avLst/>
@@ -5977,52 +6362,11 @@
           <a:p>
             <a:pPr algn="l">
               <a:lnSpc>
-                <a:spcPct val="134000"/>
+                <a:spcPct val="114000"/>
               </a:lnSpc>
             </a:pPr>
             <a:r>
-              <a:rPr sz="2500" b="0" i="0">
-                <a:solidFill>
-                  <a:srgbClr val="5A6B82"/>
-                </a:solidFill>
-                <a:latin typeface="DM Sans"/>
-                <a:ea typeface="DM Sans"/>
-                <a:cs typeface="DM Sans"/>
-              </a:rPr>
-              <a:t>Survives “show me.”</a:t>
-            </a:r>
-          </a:p>
-        </p:txBody>
-      </p:sp>
-      <p:sp>
-        <p:nvSpPr>
-          <p:cNvPr id="12" name="TextBox 11"/>
-          <p:cNvSpPr txBox="1"/>
-          <p:nvPr/>
-        </p:nvSpPr>
-        <p:spPr>
-          <a:xfrm>
-            <a:off x="1016000" y="4451604"/>
-            <a:ext cx="10160000" cy="1524000"/>
-          </a:xfrm>
-          <a:prstGeom prst="rect">
-            <a:avLst/>
-          </a:prstGeom>
-          <a:noFill/>
-        </p:spPr>
-        <p:txBody>
-          <a:bodyPr wrap="square" lIns="0" rIns="0" tIns="0" bIns="0" anchor="t">
-            <a:spAutoFit/>
-          </a:bodyPr>
-          <a:lstStyle/>
-          <a:p>
-            <a:pPr algn="l">
-              <a:lnSpc>
-                <a:spcPct val="120000"/>
-              </a:lnSpc>
-            </a:pPr>
-            <a:r>
-              <a:rPr sz="2100" b="1" i="0">
+              <a:rPr sz="2000" b="1" i="0" spc="75">
                 <a:solidFill>
                   <a:srgbClr val="C9A84C"/>
                 </a:solidFill>
@@ -6030,7 +6374,48 @@
                 <a:ea typeface="Montserrat"/>
                 <a:cs typeface="Montserrat"/>
               </a:rPr>
-              <a:t>Choose the one you can defend.</a:t>
+              <a:t>03</a:t>
+            </a:r>
+          </a:p>
+        </p:txBody>
+      </p:sp>
+      <p:sp>
+        <p:nvSpPr>
+          <p:cNvPr id="10" name="TextBox 9"/>
+          <p:cNvSpPr txBox="1"/>
+          <p:nvPr/>
+        </p:nvSpPr>
+        <p:spPr>
+          <a:xfrm>
+            <a:off x="1854200" y="3813048"/>
+            <a:ext cx="9321800" cy="1524000"/>
+          </a:xfrm>
+          <a:prstGeom prst="rect">
+            <a:avLst/>
+          </a:prstGeom>
+          <a:noFill/>
+        </p:spPr>
+        <p:txBody>
+          <a:bodyPr wrap="square" lIns="0" rIns="0" tIns="0" bIns="0" anchor="t">
+            <a:spAutoFit/>
+          </a:bodyPr>
+          <a:lstStyle/>
+          <a:p>
+            <a:pPr algn="l">
+              <a:lnSpc>
+                <a:spcPct val="112000"/>
+              </a:lnSpc>
+            </a:pPr>
+            <a:r>
+              <a:rPr sz="2900" b="1" i="0">
+                <a:solidFill>
+                  <a:srgbClr val="112345"/>
+                </a:solidFill>
+                <a:latin typeface="Montserrat"/>
+                <a:ea typeface="Montserrat"/>
+                <a:cs typeface="Montserrat"/>
+              </a:rPr>
+              <a:t>A SMALLER BOX THAN YOU</a:t>
             </a:r>
           </a:p>
         </p:txBody>
@@ -6811,7 +7196,7 @@
                 <a:ea typeface="Montserrat"/>
                 <a:cs typeface="Montserrat"/>
               </a:rPr>
-              <a:t>TEST THE CLAIM</a:t>
+              <a:t>TEST THE CLAIM, PRACTICALLY</a:t>
             </a:r>
           </a:p>
         </p:txBody>
@@ -7022,7 +7407,7 @@
                 <a:ea typeface="DM Sans"/>
                 <a:cs typeface="DM Sans"/>
               </a:rPr>
-              <a:t>Still decoding.</a:t>
+              <a:t>May still be decoding.</a:t>
             </a:r>
           </a:p>
         </p:txBody>
@@ -7148,7 +7533,7 @@
                 <a:ea typeface="DM Sans"/>
                 <a:cs typeface="DM Sans"/>
               </a:rPr>
-              <a:t>It is working.</a:t>
+              <a:t>A better sign.</a:t>
             </a:r>
           </a:p>
         </p:txBody>
